--- a/slides/pptx/week12.pptx
+++ b/slides/pptx/week12.pptx
@@ -1047,7 +1047,7 @@
           <a:p>
             <a:r>
               <a:rPr lang="en-US" dirty="0"/>
-              <a:t>Explain before lab — all in a controlled local registry (ethics: never publish a real typosquat). Defend side is graded. The SLSA self-assessment makes them reason about their own pipeline. ~3 min.</a:t>
+              <a:t>Explain before lab — the resolver simulation stands in for a live registry (ethics: never publish a real typosquat). Defend side is graded. The SLSA self-assessment makes them reason about their own pipeline. ~3 min.</a:t>
             </a:r>
             <a:endParaRPr lang="en-US" dirty="0"/>
           </a:p>
@@ -4422,7 +4422,7 @@
                 <a:ea typeface="Calibri" pitchFamily="34" charset="-122"/>
                 <a:cs typeface="Calibri" pitchFamily="34" charset="-120"/>
               </a:rPr>
-              <a:t>Attack: in a controlled registry, plant/identify a typosquat or higher-version public pkg that gets pulled in</a:t>
+              <a:t>Attack: no live registry in this lab — use the resolver simulation to watch a higher-version public pkg beat the private one</a:t>
             </a:r>
             <a:endParaRPr lang="en-US" sz="1350" dirty="0"/>
           </a:p>
